--- a/diploma/Dyplom_Series_Lab_Zahyst.pptx
+++ b/diploma/Dyplom_Series_Lab_Zahyst.pptx
@@ -2444,7 +2444,7 @@
                 <a:ea typeface="Calibri" pitchFamily="34" charset="-122"/>
                 <a:cs typeface="Calibri" pitchFamily="34" charset="-120"/>
               </a:rPr>
-              <a:t>Якість: 372 тести, CI, Docker</a:t>
+              <a:t>Якість: 402 тести, CI, Docker</a:t>
             </a:r>
             <a:endParaRPr lang="en-US" sz="2200" dirty="0"/>
           </a:p>
@@ -2997,7 +2997,7 @@
                 <a:ea typeface="Calibri" pitchFamily="34" charset="-122"/>
                 <a:cs typeface="Calibri" pitchFamily="34" charset="-120"/>
               </a:rPr>
-              <a:t>Створено Series Lab v1.8.0: майстерня, 23 CLI, 92 API, 372 тести.</a:t>
+              <a:t>Створено Series Lab v1.8.0: майстерня, 24 CLI, 94 API, 402 тести.</a:t>
             </a:r>
             <a:endParaRPr lang="en-US" sz="1600" dirty="0"/>
           </a:p>

--- a/diploma/Dyplom_Series_Lab_Zahyst.pptx
+++ b/diploma/Dyplom_Series_Lab_Zahyst.pptx
@@ -2444,7 +2444,7 @@
                 <a:ea typeface="Calibri" pitchFamily="34" charset="-122"/>
                 <a:cs typeface="Calibri" pitchFamily="34" charset="-120"/>
               </a:rPr>
-              <a:t>Якість: 402 тести, CI, Docker</a:t>
+              <a:t>Якість: 414 тестів, CI, Docker</a:t>
             </a:r>
             <a:endParaRPr lang="en-US" sz="2200" dirty="0"/>
           </a:p>
@@ -2997,7 +2997,7 @@
                 <a:ea typeface="Calibri" pitchFamily="34" charset="-122"/>
                 <a:cs typeface="Calibri" pitchFamily="34" charset="-120"/>
               </a:rPr>
-              <a:t>Створено Series Lab v1.8.0: майстерня, 24 CLI, 94 API, 402 тести.</a:t>
+              <a:t>Створено Series Lab v1.8.0: майстерня, 24 CLI, 94 API, 414 тестів.</a:t>
             </a:r>
             <a:endParaRPr lang="en-US" sz="1600" dirty="0"/>
           </a:p>

--- a/diploma/Dyplom_Series_Lab_Zahyst.pptx
+++ b/diploma/Dyplom_Series_Lab_Zahyst.pptx
@@ -2188,7 +2188,7 @@
                 <a:ea typeface="Calibri" pitchFamily="34" charset="-122"/>
                 <a:cs typeface="Calibri" pitchFamily="34" charset="-120"/>
               </a:rPr>
-              <a:t>Series Lab v1.8.0 · lab.w3ir.io</a:t>
+              <a:t>Series Lab v1.9.0 · lab.w3ir.io</a:t>
             </a:r>
             <a:endParaRPr lang="en-US" sz="1600" dirty="0"/>
           </a:p>
@@ -2444,7 +2444,7 @@
                 <a:ea typeface="Calibri" pitchFamily="34" charset="-122"/>
                 <a:cs typeface="Calibri" pitchFamily="34" charset="-120"/>
               </a:rPr>
-              <a:t>Якість: 414 тестів, CI, Docker</a:t>
+              <a:t>Якість: 439 тестів, npm run ci, Docker</a:t>
             </a:r>
             <a:endParaRPr lang="en-US" sz="2200" dirty="0"/>
           </a:p>
@@ -2997,7 +2997,7 @@
                 <a:ea typeface="Calibri" pitchFamily="34" charset="-122"/>
                 <a:cs typeface="Calibri" pitchFamily="34" charset="-120"/>
               </a:rPr>
-              <a:t>Створено Series Lab v1.8.0: майстерня, 24 CLI, 94 API, 414 тестів.</a:t>
+              <a:t>Створено Series Lab v1.9.0: майстерня, 25 CLI, 94 API, 439 тестів.</a:t>
             </a:r>
             <a:endParaRPr lang="en-US" sz="1600" dirty="0"/>
           </a:p>

--- a/diploma/Dyplom_Series_Lab_Zahyst.pptx
+++ b/diploma/Dyplom_Series_Lab_Zahyst.pptx
@@ -2444,7 +2444,7 @@
                 <a:ea typeface="Calibri" pitchFamily="34" charset="-122"/>
                 <a:cs typeface="Calibri" pitchFamily="34" charset="-120"/>
               </a:rPr>
-              <a:t>Якість: 439 тестів, npm run ci, Docker</a:t>
+              <a:t>Якість: 457 тестів, npm run ci, Docker</a:t>
             </a:r>
             <a:endParaRPr lang="en-US" sz="2200" dirty="0"/>
           </a:p>
@@ -2997,7 +2997,7 @@
                 <a:ea typeface="Calibri" pitchFamily="34" charset="-122"/>
                 <a:cs typeface="Calibri" pitchFamily="34" charset="-120"/>
               </a:rPr>
-              <a:t>Створено Series Lab v1.9.0: майстерня, 25 CLI, 94 API, 439 тестів.</a:t>
+              <a:t>Створено Series Lab v1.9.0: майстерня, 25 CLI, 95 API, 457 тестів.</a:t>
             </a:r>
             <a:endParaRPr lang="en-US" sz="1600" dirty="0"/>
           </a:p>

--- a/diploma/Dyplom_Series_Lab_Zahyst.pptx
+++ b/diploma/Dyplom_Series_Lab_Zahyst.pptx
@@ -2997,7 +2997,7 @@
                 <a:ea typeface="Calibri" pitchFamily="34" charset="-122"/>
                 <a:cs typeface="Calibri" pitchFamily="34" charset="-120"/>
               </a:rPr>
-              <a:t>Створено Series Lab v1.9.0: майстерня, 25 CLI, 95 API, 457 тестів.</a:t>
+              <a:t>Створено Series Lab v1.10.0: майстерня, 25 CLI, 95 API, 457 тестів.</a:t>
             </a:r>
             <a:endParaRPr lang="en-US" sz="1600" dirty="0"/>
           </a:p>

--- a/diploma/Dyplom_Series_Lab_Zahyst.pptx
+++ b/diploma/Dyplom_Series_Lab_Zahyst.pptx
@@ -2188,7 +2188,7 @@
                 <a:ea typeface="Calibri" pitchFamily="34" charset="-122"/>
                 <a:cs typeface="Calibri" pitchFamily="34" charset="-120"/>
               </a:rPr>
-              <a:t>Series Lab v1.9.0 · lab.w3ir.io</a:t>
+              <a:t>Series Lab v1.10.0 · lab.w3ir.io</a:t>
             </a:r>
             <a:endParaRPr lang="en-US" sz="1600" dirty="0"/>
           </a:p>

--- a/diploma/Dyplom_Series_Lab_Zahyst.pptx
+++ b/diploma/Dyplom_Series_Lab_Zahyst.pptx
@@ -2188,7 +2188,7 @@
                 <a:ea typeface="Calibri" pitchFamily="34" charset="-122"/>
                 <a:cs typeface="Calibri" pitchFamily="34" charset="-120"/>
               </a:rPr>
-              <a:t>Series Lab v1.9.0 · lab.w3ir.io</a:t>
+              <a:t>Series Lab v1.10.0 · lab.w3ir.io</a:t>
             </a:r>
             <a:endParaRPr lang="en-US" sz="1600" dirty="0"/>
           </a:p>
@@ -2444,7 +2444,7 @@
                 <a:ea typeface="Calibri" pitchFamily="34" charset="-122"/>
                 <a:cs typeface="Calibri" pitchFamily="34" charset="-120"/>
               </a:rPr>
-              <a:t>Якість: 439 тестів, npm run ci, Docker</a:t>
+              <a:t>Якість: 457 тестів, npm run ci, Docker</a:t>
             </a:r>
             <a:endParaRPr lang="en-US" sz="2200" dirty="0"/>
           </a:p>
@@ -2997,7 +2997,7 @@
                 <a:ea typeface="Calibri" pitchFamily="34" charset="-122"/>
                 <a:cs typeface="Calibri" pitchFamily="34" charset="-120"/>
               </a:rPr>
-              <a:t>Створено Series Lab v1.9.0: майстерня, 25 CLI, 94 API, 439 тестів.</a:t>
+              <a:t>Створено Series Lab v1.10.0: майстерня, 25 CLI, 95 API, 457 тестів.</a:t>
             </a:r>
             <a:endParaRPr lang="en-US" sz="1600" dirty="0"/>
           </a:p>

--- a/diploma/Dyplom_Series_Lab_Zahyst.pptx
+++ b/diploma/Dyplom_Series_Lab_Zahyst.pptx
@@ -2444,7 +2444,7 @@
                 <a:ea typeface="Calibri" pitchFamily="34" charset="-122"/>
                 <a:cs typeface="Calibri" pitchFamily="34" charset="-120"/>
               </a:rPr>
-              <a:t>Якість: 457 тестів, npm run ci, Docker</a:t>
+              <a:t>Якість: 479 тестів, npm run ci, Docker</a:t>
             </a:r>
             <a:endParaRPr lang="en-US" sz="2200" dirty="0"/>
           </a:p>
@@ -2997,7 +2997,7 @@
                 <a:ea typeface="Calibri" pitchFamily="34" charset="-122"/>
                 <a:cs typeface="Calibri" pitchFamily="34" charset="-120"/>
               </a:rPr>
-              <a:t>Створено Series Lab v1.10.0: майстерня, 25 CLI, 95 API, 457 тестів.</a:t>
+              <a:t>Створено Series Lab v1.10.0: майстерня, 25 CLI, 95 API, 479 тестів.</a:t>
             </a:r>
             <a:endParaRPr lang="en-US" sz="1600" dirty="0"/>
           </a:p>

--- a/diploma/Dyplom_Series_Lab_Zahyst.pptx
+++ b/diploma/Dyplom_Series_Lab_Zahyst.pptx
@@ -2154,7 +2154,7 @@
                 <a:ea typeface="Calibri" pitchFamily="34" charset="-122"/>
                 <a:cs typeface="Calibri" pitchFamily="34" charset="-120"/>
               </a:rPr>
-              <a:t>Титаренко Володимир · група 441 · спец. 124 «Системний аналіз»</a:t>
+              <a:t>Титаренко Володимир · група 463 · спец. 124 «Системний аналіз»</a:t>
             </a:r>
             <a:endParaRPr lang="en-US" sz="1600" dirty="0"/>
           </a:p>
